--- a/第12章 项目质量管理_详细版.pptx
+++ b/第12章 项目质量管理_详细版.pptx
@@ -6318,105 +6318,6 @@
               <a:ea typeface="楷体" panose="02010609060101010101" pitchFamily="49" charset="-122"/>
             </a:endParaRPr>
           </a:p>
-          <a:p>
-            <a:pPr marL="0" indent="0" algn="just">
-              <a:lnSpc>
-                <a:spcPct val="100000"/>
-              </a:lnSpc>
-              <a:spcBef>
-                <a:spcPts val="0"/>
-              </a:spcBef>
-              <a:buNone/>
-            </a:pPr>
-            <a:r>
-              <a:rPr lang="zh-CN" altLang="en-US" sz="2400" dirty="0">
-                <a:latin typeface="Times New Roman" panose="02020603050405020304" pitchFamily="18" charset="0"/>
-                <a:ea typeface="楷体" panose="02010609060101010101" pitchFamily="49" charset="-122"/>
-              </a:rPr>
-              <a:t>将</a:t>
-            </a:r>
-            <a:r>
-              <a:rPr lang="en-US" altLang="zh-CN" sz="2400" dirty="0">
-                <a:latin typeface="Times New Roman" panose="02020603050405020304" pitchFamily="18" charset="0"/>
-                <a:ea typeface="楷体" panose="02010609060101010101" pitchFamily="49" charset="-122"/>
-              </a:rPr>
-              <a:t>PDCA</a:t>
-            </a:r>
-            <a:r>
-              <a:rPr lang="zh-CN" altLang="en-US" sz="2400" dirty="0">
-                <a:latin typeface="Times New Roman" panose="02020603050405020304" pitchFamily="18" charset="0"/>
-                <a:ea typeface="楷体" panose="02010609060101010101" pitchFamily="49" charset="-122"/>
-              </a:rPr>
-              <a:t>循环画作是轮子，轮子滚动一圈就是一次</a:t>
-            </a:r>
-            <a:r>
-              <a:rPr lang="en-US" altLang="zh-CN" sz="2400" dirty="0">
-                <a:latin typeface="Times New Roman" panose="02020603050405020304" pitchFamily="18" charset="0"/>
-                <a:ea typeface="楷体" panose="02010609060101010101" pitchFamily="49" charset="-122"/>
-              </a:rPr>
-              <a:t>PDCA</a:t>
-            </a:r>
-            <a:r>
-              <a:rPr lang="zh-CN" altLang="en-US" sz="2400" dirty="0">
-                <a:latin typeface="Times New Roman" panose="02020603050405020304" pitchFamily="18" charset="0"/>
-                <a:ea typeface="楷体" panose="02010609060101010101" pitchFamily="49" charset="-122"/>
-              </a:rPr>
-              <a:t>循环一次。随着轮子的滚动，实现项目质量的提升</a:t>
-            </a:r>
-            <a:r>
-              <a:rPr lang="en-US" altLang="zh-CN" sz="2400" dirty="0">
-                <a:latin typeface="Times New Roman" panose="02020603050405020304" pitchFamily="18" charset="0"/>
-                <a:ea typeface="楷体" panose="02010609060101010101" pitchFamily="49" charset="-122"/>
-              </a:rPr>
-              <a:t>(</a:t>
-            </a:r>
-            <a:r>
-              <a:rPr lang="zh-CN" altLang="en-US" sz="2400" dirty="0">
-                <a:latin typeface="Times New Roman" panose="02020603050405020304" pitchFamily="18" charset="0"/>
-                <a:ea typeface="楷体" panose="02010609060101010101" pitchFamily="49" charset="-122"/>
-              </a:rPr>
-              <a:t>爬坡</a:t>
-            </a:r>
-            <a:r>
-              <a:rPr lang="en-US" altLang="zh-CN" sz="2400" dirty="0">
-                <a:latin typeface="Times New Roman" panose="02020603050405020304" pitchFamily="18" charset="0"/>
-                <a:ea typeface="楷体" panose="02010609060101010101" pitchFamily="49" charset="-122"/>
-              </a:rPr>
-              <a:t>)</a:t>
-            </a:r>
-            <a:r>
-              <a:rPr lang="zh-CN" altLang="en-US" sz="2400" dirty="0">
-                <a:latin typeface="Times New Roman" panose="02020603050405020304" pitchFamily="18" charset="0"/>
-                <a:ea typeface="楷体" panose="02010609060101010101" pitchFamily="49" charset="-122"/>
-              </a:rPr>
-              <a:t>。垫脚石放在轮子下侧，表示标准化，防止质量倒退、固化改进成果的基石。</a:t>
-            </a:r>
-            <a:endParaRPr lang="en-US" altLang="zh-CN" sz="2400" dirty="0">
-              <a:latin typeface="Times New Roman" panose="02020603050405020304" pitchFamily="18" charset="0"/>
-              <a:ea typeface="楷体" panose="02010609060101010101" pitchFamily="49" charset="-122"/>
-            </a:endParaRPr>
-          </a:p>
-          <a:p>
-            <a:pPr marL="0" indent="0" algn="just">
-              <a:lnSpc>
-                <a:spcPct val="100000"/>
-              </a:lnSpc>
-              <a:spcBef>
-                <a:spcPts val="0"/>
-              </a:spcBef>
-              <a:buNone/>
-            </a:pPr>
-            <a:br>
-              <a:rPr lang="en-US" altLang="zh-CN" sz="2400" dirty="0">
-                <a:latin typeface="Times New Roman" panose="02020603050405020304" pitchFamily="18" charset="0"/>
-                <a:ea typeface="楷体" panose="02010609060101010101" pitchFamily="49" charset="-122"/>
-              </a:rPr>
-            </a:br>
-            <a:endParaRPr lang="en-US" altLang="zh-CN" sz="2400" dirty="0">
-              <a:latin typeface="Times New Roman" panose="02020603050405020304" pitchFamily="18" charset="0"/>
-              <a:ea typeface="楷体" panose="02010609060101010101" pitchFamily="49" charset="-122"/>
-            </a:endParaRPr>
-          </a:p>
         </p:txBody>
       </p:sp>
     </p:spTree>
@@ -6429,85 +6330,6 @@
   <p:clrMapOvr>
     <a:masterClrMapping/>
   </p:clrMapOvr>
-  <p:timing>
-    <p:tnLst>
-      <p:par>
-        <p:cTn id="1" dur="indefinite" restart="never" nodeType="tmRoot">
-          <p:childTnLst>
-            <p:seq concurrent="1" nextAc="seek">
-              <p:cTn id="2" dur="indefinite" nodeType="mainSeq">
-                <p:childTnLst>
-                  <p:par>
-                    <p:cTn id="3" fill="hold">
-                      <p:stCondLst>
-                        <p:cond delay="indefinite"/>
-                      </p:stCondLst>
-                      <p:childTnLst>
-                        <p:par>
-                          <p:cTn id="4" fill="hold">
-                            <p:stCondLst>
-                              <p:cond delay="0"/>
-                            </p:stCondLst>
-                            <p:childTnLst>
-                              <p:par>
-                                <p:cTn id="5" presetID="1" presetClass="entr" presetSubtype="0" fill="hold" nodeType="clickEffect">
-                                  <p:stCondLst>
-                                    <p:cond delay="0"/>
-                                  </p:stCondLst>
-                                  <p:childTnLst>
-                                    <p:set>
-                                      <p:cBhvr>
-                                        <p:cTn id="6" dur="1" fill="hold">
-                                          <p:stCondLst>
-                                            <p:cond delay="0"/>
-                                          </p:stCondLst>
-                                        </p:cTn>
-                                        <p:tgtEl>
-                                          <p:spTgt spid="3">
-                                            <p:txEl>
-                                              <p:pRg st="22" end="22"/>
-                                            </p:txEl>
-                                          </p:spTgt>
-                                        </p:tgtEl>
-                                        <p:attrNameLst>
-                                          <p:attrName>style.visibility</p:attrName>
-                                        </p:attrNameLst>
-                                      </p:cBhvr>
-                                      <p:to>
-                                        <p:strVal val="visible"/>
-                                      </p:to>
-                                    </p:set>
-                                  </p:childTnLst>
-                                </p:cTn>
-                              </p:par>
-                            </p:childTnLst>
-                          </p:cTn>
-                        </p:par>
-                      </p:childTnLst>
-                    </p:cTn>
-                  </p:par>
-                </p:childTnLst>
-              </p:cTn>
-              <p:prevCondLst>
-                <p:cond evt="onPrev" delay="0">
-                  <p:tgtEl>
-                    <p:sldTgt/>
-                  </p:tgtEl>
-                </p:cond>
-              </p:prevCondLst>
-              <p:nextCondLst>
-                <p:cond evt="onNext" delay="0">
-                  <p:tgtEl>
-                    <p:sldTgt/>
-                  </p:tgtEl>
-                </p:cond>
-              </p:nextCondLst>
-            </p:seq>
-          </p:childTnLst>
-        </p:cTn>
-      </p:par>
-    </p:tnLst>
-  </p:timing>
 </p:sld>
 </file>
 

--- a/第12章 项目质量管理_详细版.pptx
+++ b/第12章 项目质量管理_详细版.pptx
@@ -291,7 +291,7 @@
           <a:p>
             <a:fld id="{64AC8431-D6CA-4E0F-89EE-8582ABC486A2}" type="datetimeFigureOut">
               <a:rPr lang="zh-CN" altLang="en-US" smtClean="0"/>
-              <a:t>2026/3/29</a:t>
+              <a:t>2026/3/31</a:t>
             </a:fld>
             <a:endParaRPr lang="zh-CN" altLang="en-US"/>
           </a:p>
@@ -773,7 +773,7 @@
           <a:p>
             <a:fld id="{48A87A34-81AB-432B-8DAE-1953F412C126}" type="datetimeFigureOut">
               <a:rPr lang="en-US" smtClean="0"/>
-              <a:t>3/29/2026</a:t>
+              <a:t>3/31/2026</a:t>
             </a:fld>
             <a:endParaRPr lang="en-US" dirty="0"/>
           </a:p>
@@ -938,7 +938,7 @@
           <a:p>
             <a:fld id="{48A87A34-81AB-432B-8DAE-1953F412C126}" type="datetimeFigureOut">
               <a:rPr lang="en-US" smtClean="0"/>
-              <a:t>3/29/2026</a:t>
+              <a:t>3/31/2026</a:t>
             </a:fld>
             <a:endParaRPr lang="en-US" dirty="0"/>
           </a:p>
@@ -1113,7 +1113,7 @@
           <a:p>
             <a:fld id="{48A87A34-81AB-432B-8DAE-1953F412C126}" type="datetimeFigureOut">
               <a:rPr lang="en-US" smtClean="0"/>
-              <a:t>3/29/2026</a:t>
+              <a:t>3/31/2026</a:t>
             </a:fld>
             <a:endParaRPr lang="en-US" dirty="0"/>
           </a:p>
@@ -1434,7 +1434,7 @@
           <a:p>
             <a:fld id="{48A87A34-81AB-432B-8DAE-1953F412C126}" type="datetimeFigureOut">
               <a:rPr lang="en-US" smtClean="0"/>
-              <a:t>3/29/2026</a:t>
+              <a:t>3/31/2026</a:t>
             </a:fld>
             <a:endParaRPr lang="en-US" dirty="0"/>
           </a:p>
@@ -1673,7 +1673,7 @@
           <a:p>
             <a:fld id="{48A87A34-81AB-432B-8DAE-1953F412C126}" type="datetimeFigureOut">
               <a:rPr lang="en-US" smtClean="0"/>
-              <a:t>3/29/2026</a:t>
+              <a:t>3/31/2026</a:t>
             </a:fld>
             <a:endParaRPr lang="en-US" dirty="0"/>
           </a:p>
@@ -1900,7 +1900,7 @@
           <a:p>
             <a:fld id="{48A87A34-81AB-432B-8DAE-1953F412C126}" type="datetimeFigureOut">
               <a:rPr lang="en-US" smtClean="0"/>
-              <a:t>3/29/2026</a:t>
+              <a:t>3/31/2026</a:t>
             </a:fld>
             <a:endParaRPr lang="en-US" dirty="0"/>
           </a:p>
@@ -2262,7 +2262,7 @@
           <a:p>
             <a:fld id="{48A87A34-81AB-432B-8DAE-1953F412C126}" type="datetimeFigureOut">
               <a:rPr lang="en-US" smtClean="0"/>
-              <a:t>3/29/2026</a:t>
+              <a:t>3/31/2026</a:t>
             </a:fld>
             <a:endParaRPr lang="en-US" dirty="0"/>
           </a:p>
@@ -2375,7 +2375,7 @@
           <a:p>
             <a:fld id="{48A87A34-81AB-432B-8DAE-1953F412C126}" type="datetimeFigureOut">
               <a:rPr lang="en-US" smtClean="0"/>
-              <a:t>3/29/2026</a:t>
+              <a:t>3/31/2026</a:t>
             </a:fld>
             <a:endParaRPr lang="en-US" dirty="0"/>
           </a:p>
@@ -2465,7 +2465,7 @@
           <a:p>
             <a:fld id="{48A87A34-81AB-432B-8DAE-1953F412C126}" type="datetimeFigureOut">
               <a:rPr lang="en-US" smtClean="0"/>
-              <a:t>3/29/2026</a:t>
+              <a:t>3/31/2026</a:t>
             </a:fld>
             <a:endParaRPr lang="en-US" dirty="0"/>
           </a:p>
@@ -2737,7 +2737,7 @@
           <a:p>
             <a:fld id="{48A87A34-81AB-432B-8DAE-1953F412C126}" type="datetimeFigureOut">
               <a:rPr lang="en-US" smtClean="0"/>
-              <a:t>3/29/2026</a:t>
+              <a:t>3/31/2026</a:t>
             </a:fld>
             <a:endParaRPr lang="en-US" dirty="0"/>
           </a:p>
@@ -2989,7 +2989,7 @@
           <a:p>
             <a:fld id="{48A87A34-81AB-432B-8DAE-1953F412C126}" type="datetimeFigureOut">
               <a:rPr lang="en-US" smtClean="0"/>
-              <a:t>3/29/2026</a:t>
+              <a:t>3/31/2026</a:t>
             </a:fld>
             <a:endParaRPr lang="en-US" dirty="0"/>
           </a:p>
@@ -3202,7 +3202,7 @@
           <a:p>
             <a:fld id="{C764DE79-268F-4C1A-8933-263129D2AF90}" type="datetimeFigureOut">
               <a:rPr lang="en-US" dirty="0"/>
-              <a:t>3/29/2026</a:t>
+              <a:t>3/31/2026</a:t>
             </a:fld>
             <a:endParaRPr lang="en-US" dirty="0"/>
           </a:p>
@@ -18875,7 +18875,7 @@
                 <a:latin typeface="Times New Roman" panose="02020603050405020304" pitchFamily="18" charset="0"/>
                 <a:ea typeface="楷体" panose="02010609060101010101" pitchFamily="49" charset="-122"/>
               </a:rPr>
-              <a:t>12.3.3 </a:t>
+              <a:t>3.3 </a:t>
             </a:r>
             <a:r>
               <a:rPr dirty="0" err="1">
